--- a/assets/powerpoints/module-n2-bonjour/B1-tu-ou-vous.pptx
+++ b/assets/powerpoints/module-n2-bonjour/B1-tu-ou-vous.pptx
@@ -12045,7 +12045,25 @@
                 </a:solidFill>
                 <a:latin typeface="Verdana"/>
               </a:rPr>
-              <a:t>On ne mélange pas les deux dans la même phrase. Quand on choisit « vous », &lt;b&gt;tout&lt;/b&gt; le reste suit : le verbe, et le « et vous ? » de la fin. Un échange qui commence au « vous » finit au « vous ».</a:t>
+              <a:t>On ne mélange pas les deux dans la même phrase. Quand on choisit « vous », </a:t>
+            </a:r>
+            <a:r>
+              <a:rPr sz="2000" b="1" i="0">
+                <a:solidFill>
+                  <a:srgbClr val="4B4F52"/>
+                </a:solidFill>
+                <a:latin typeface="Verdana"/>
+              </a:rPr>
+              <a:t>tout</a:t>
+            </a:r>
+            <a:r>
+              <a:rPr sz="2000" b="0" i="0">
+                <a:solidFill>
+                  <a:srgbClr val="4B4F52"/>
+                </a:solidFill>
+                <a:latin typeface="Verdana"/>
+              </a:rPr>
+              <a:t> le reste suit : le verbe, et le « et vous ? » de la fin. Un échange qui commence au « vous » finit au « vous ».</a:t>
             </a:r>
           </a:p>
         </p:txBody>
